--- a/PPTX_Files_Judging/xXrKkz5.pptx
+++ b/PPTX_Files_Judging/xXrKkz5.pptx
@@ -257,7 +257,7 @@
           <a:p>
             <a:fld id="{3ADA5B35-8E6C-AF4B-A7A0-5747A2FF9C2C}" type="datetimeFigureOut">
               <a:rPr lang="en-US" smtClean="0"/>
-              <a:t>4/21/25</a:t>
+              <a:t>5/3/25</a:t>
             </a:fld>
             <a:endParaRPr lang="en-US"/>
           </a:p>
@@ -6666,6 +6666,30 @@
           </a:p>
         </p:txBody>
       </p:sp>
+      <p:pic>
+        <p:nvPicPr>
+          <p:cNvPr id="2051" name="Picture 2050" descr="45C.png"/>
+          <p:cNvPicPr>
+            <a:picLocks noChangeAspect="1"/>
+          </p:cNvPicPr>
+          <p:nvPr/>
+        </p:nvPicPr>
+        <p:blipFill>
+          <a:blip r:embed="rId3"/>
+          <a:stretch>
+            <a:fillRect/>
+          </a:stretch>
+        </p:blipFill>
+        <p:spPr>
+          <a:xfrm>
+            <a:off x="29279088" y="1234440"/>
+            <a:ext cx="2103120" cy="3108960"/>
+          </a:xfrm>
+          <a:prstGeom prst="rect">
+            <a:avLst/>
+          </a:prstGeom>
+        </p:spPr>
+      </p:pic>
     </p:spTree>
   </p:cSld>
   <p:clrMapOvr>
